--- a/assets/ppts/M2.2.2_IPv4_Subnetting_CIDR.pptx
+++ b/assets/ppts/M2.2.2_IPv4_Subnetting_CIDR.pptx
@@ -9,6 +9,7 @@
     <p:sldId id="257" r:id="rId8"/>
     <p:sldId id="258" r:id="rId9"/>
     <p:sldId id="259" r:id="rId10"/>
+    <p:sldId id="260" r:id="rId11"/>
   </p:sldIdLst>
   <p:sldSz cx="12191695" cy="6858000" type="screen4x3"/>
   <p:notesSz cx="6858000" cy="9144000"/>
@@ -3142,8 +3143,8 @@
         </p:nvSpPr>
         <p:spPr>
           <a:xfrm>
-            <a:off x="822960" y="1188720"/>
-            <a:ext cx="164592" cy="4480560"/>
+            <a:off x="0" y="0"/>
+            <a:ext cx="12191695" cy="137160"/>
           </a:xfrm>
           <a:prstGeom prst="rect">
             <a:avLst/>
@@ -3179,14 +3180,57 @@
       </p:sp>
       <p:sp>
         <p:nvSpPr>
-          <p:cNvPr id="4" name="TextBox 3"/>
+          <p:cNvPr id="4" name="Rectangle 3"/>
+          <p:cNvSpPr/>
+          <p:nvPr/>
+        </p:nvSpPr>
+        <p:spPr>
+          <a:xfrm>
+            <a:off x="822960" y="1097280"/>
+            <a:ext cx="164592" cy="4663440"/>
+          </a:xfrm>
+          <a:prstGeom prst="rect">
+            <a:avLst/>
+          </a:prstGeom>
+          <a:solidFill>
+            <a:srgbClr val="D97706"/>
+          </a:solidFill>
+          <a:ln>
+            <a:noFill/>
+          </a:ln>
+        </p:spPr>
+        <p:style>
+          <a:lnRef idx="1">
+            <a:schemeClr val="accent1"/>
+          </a:lnRef>
+          <a:fillRef idx="3">
+            <a:schemeClr val="accent1"/>
+          </a:fillRef>
+          <a:effectRef idx="2">
+            <a:schemeClr val="accent1"/>
+          </a:effectRef>
+          <a:fontRef idx="minor">
+            <a:schemeClr val="lt1"/>
+          </a:fontRef>
+        </p:style>
+        <p:txBody>
+          <a:bodyPr rtlCol="0" anchor="ctr"/>
+          <a:lstStyle/>
+          <a:p>
+            <a:pPr algn="ctr"/>
+          </a:p>
+        </p:txBody>
+      </p:sp>
+      <p:sp>
+        <p:nvSpPr>
+          <p:cNvPr id="5" name="TextBox 4"/>
           <p:cNvSpPr txBox="1"/>
           <p:nvPr/>
         </p:nvSpPr>
         <p:spPr>
           <a:xfrm>
-            <a:off x="1280160" y="1097280"/>
-            <a:ext cx="10058400" cy="4663440"/>
+            <a:off x="1234440" y="1005840"/>
+            <a:ext cx="10241280" cy="4846320"/>
           </a:xfrm>
           <a:prstGeom prst="rect">
             <a:avLst/>
@@ -3201,70 +3245,165 @@
           <a:p>
             <a:pPr>
               <a:spcAft>
+                <a:spcPts val="1000"/>
+              </a:spcAft>
+              <a:defRPr b="1" sz="1300">
+                <a:solidFill>
+                  <a:srgbClr val="D97706"/>
+                </a:solidFill>
+              </a:defRPr>
+            </a:pPr>
+            <a:r>
+              <a:t>PCCST501 Computer Networks | KTU 2024 Scheme • MODULE 2 • M2.2.2</a:t>
+            </a:r>
+          </a:p>
+          <a:p>
+            <a:pPr>
+              <a:spcAft>
                 <a:spcPts val="1200"/>
               </a:spcAft>
-              <a:defRPr b="1" sz="1300">
+              <a:defRPr b="1" sz="3000">
+                <a:solidFill>
+                  <a:srgbClr val="F8FAFC"/>
+                </a:solidFill>
+              </a:defRPr>
+            </a:pPr>
+            <a:r>
+              <a:t>IPv4 Addressing, Subnetting, CIDR &amp; NAT</a:t>
+            </a:r>
+          </a:p>
+          <a:p>
+            <a:pPr>
+              <a:spcAft>
+                <a:spcPts val="2400"/>
+              </a:spcAft>
+              <a:defRPr sz="1600">
+                <a:solidFill>
+                  <a:srgbClr val="94A3B8"/>
+                </a:solidFill>
+              </a:defRPr>
+            </a:pPr>
+            <a:r>
+              <a:t>IPv4 20-60 Byte Header, Fragmentation &amp; Reassembly, Classless Addressing (CIDR), Subnet Design, NAT/PAT, ICMP Protocol</a:t>
+            </a:r>
+          </a:p>
+          <a:p>
+            <a:pPr>
+              <a:spcAft>
+                <a:spcPts val="300"/>
+              </a:spcAft>
+              <a:defRPr b="1" sz="1350">
+                <a:solidFill>
+                  <a:srgbClr val="E2E8F0"/>
+                </a:solidFill>
+              </a:defRPr>
+            </a:pPr>
+            <a:r>
+              <a:t>Prepared by: Prof. Anju Markose | Assistant Professor, Dept. of CSE | VJCET</a:t>
+            </a:r>
+          </a:p>
+          <a:p>
+            <a:pPr>
+              <a:defRPr sz="1150">
+                <a:solidFill>
+                  <a:srgbClr val="94A3B8"/>
+                </a:solidFill>
+              </a:defRPr>
+            </a:pPr>
+            <a:r>
+              <a:t>Viswajyothi College of Engineering and Technology (VJCET), Vazhakulam • KTU S5 CSE</a:t>
+            </a:r>
+          </a:p>
+        </p:txBody>
+      </p:sp>
+      <p:sp>
+        <p:nvSpPr>
+          <p:cNvPr id="6" name="Rounded Rectangle 5"/>
+          <p:cNvSpPr/>
+          <p:nvPr/>
+        </p:nvSpPr>
+        <p:spPr>
+          <a:xfrm>
+            <a:off x="8412480" y="5120640"/>
+            <a:ext cx="3017520" cy="822960"/>
+          </a:xfrm>
+          <a:prstGeom prst="roundRect">
+            <a:avLst/>
+          </a:prstGeom>
+          <a:solidFill>
+            <a:srgbClr val="1E293B"/>
+          </a:solidFill>
+          <a:ln w="12700">
+            <a:solidFill>
+              <a:srgbClr val="0E7490"/>
+            </a:solidFill>
+          </a:ln>
+        </p:spPr>
+        <p:style>
+          <a:lnRef idx="1">
+            <a:schemeClr val="accent1"/>
+          </a:lnRef>
+          <a:fillRef idx="3">
+            <a:schemeClr val="accent1"/>
+          </a:fillRef>
+          <a:effectRef idx="2">
+            <a:schemeClr val="accent1"/>
+          </a:effectRef>
+          <a:fontRef idx="minor">
+            <a:schemeClr val="lt1"/>
+          </a:fontRef>
+        </p:style>
+        <p:txBody>
+          <a:bodyPr rtlCol="0" anchor="ctr"/>
+          <a:lstStyle/>
+          <a:p>
+            <a:pPr algn="ctr"/>
+          </a:p>
+        </p:txBody>
+      </p:sp>
+      <p:sp>
+        <p:nvSpPr>
+          <p:cNvPr id="7" name="TextBox 6"/>
+          <p:cNvSpPr txBox="1"/>
+          <p:nvPr/>
+        </p:nvSpPr>
+        <p:spPr>
+          <a:xfrm>
+            <a:off x="8503920" y="5166360"/>
+            <a:ext cx="2834640" cy="731520"/>
+          </a:xfrm>
+          <a:prstGeom prst="rect">
+            <a:avLst/>
+          </a:prstGeom>
+          <a:noFill/>
+        </p:spPr>
+        <p:txBody>
+          <a:bodyPr wrap="none">
+            <a:spAutoFit/>
+          </a:bodyPr>
+          <a:lstStyle/>
+          <a:p>
+            <a:pPr>
+              <a:defRPr b="1" sz="1050">
                 <a:solidFill>
                   <a:srgbClr val="D97706"/>
                 </a:solidFill>
               </a:defRPr>
             </a:pPr>
             <a:r>
-              <a:t>PCCST501 Computer Networks | KTU 2024 Scheme • MODULE 2 • M2.2.2</a:t>
-            </a:r>
-          </a:p>
-          <a:p>
-            <a:pPr>
-              <a:spcAft>
-                <a:spcPts val="1400"/>
-              </a:spcAft>
-              <a:defRPr b="1" sz="3200">
+              <a:t>KTU B.Tech Curriculum</a:t>
+            </a:r>
+          </a:p>
+          <a:p>
+            <a:pPr>
+              <a:defRPr sz="950">
                 <a:solidFill>
                   <a:srgbClr val="F8FAFC"/>
                 </a:solidFill>
               </a:defRPr>
             </a:pPr>
             <a:r>
-              <a:t>Network Layer Protocols: IPv4 &amp; Subnetting</a:t>
-            </a:r>
-          </a:p>
-          <a:p>
-            <a:pPr>
-              <a:spcAft>
-                <a:spcPts val="2800"/>
-              </a:spcAft>
-              <a:defRPr sz="1700">
-                <a:solidFill>
-                  <a:srgbClr val="94A3B8"/>
-                </a:solidFill>
-              </a:defRPr>
-            </a:pPr>
-            <a:r>
-              <a:t>IPv4 Header Format, Subnetting, CIDR Notation, VLSM, ARP, ICMP, DHCP &amp; NAT</a:t>
-            </a:r>
-          </a:p>
-          <a:p>
-            <a:pPr>
-              <a:defRPr b="1" sz="1300">
-                <a:solidFill>
-                  <a:srgbClr val="E2E8F0"/>
-                </a:solidFill>
-              </a:defRPr>
-            </a:pPr>
-            <a:r>
-              <a:t>Prepared by: Prof. Anju Markose | Assistant Professor, Dept. of CSE | VJCET</a:t>
-            </a:r>
-          </a:p>
-          <a:p>
-            <a:pPr>
-              <a:defRPr sz="1100">
-                <a:solidFill>
-                  <a:srgbClr val="94A3B8"/>
-                </a:solidFill>
-              </a:defRPr>
-            </a:pPr>
-            <a:r>
-              <a:t>Viswajyothi College of Engineering and Technology (VJCET), Vazhakulam</a:t>
+              <a:t>Official Classroom Slide Deck</a:t>
             </a:r>
           </a:p>
         </p:txBody>
@@ -3396,14 +3535,14 @@
           <a:lstStyle/>
           <a:p>
             <a:pPr>
-              <a:defRPr b="1" sz="2300">
+              <a:defRPr b="1" sz="2200">
                 <a:solidFill>
                   <a:srgbClr val="F8FAFC"/>
                 </a:solidFill>
               </a:defRPr>
             </a:pPr>
             <a:r>
-              <a:t>2.2.2.1 IPv4 Datagram Header Structure</a:t>
+              <a:t>2.2.2.1 IPv4 Header Format &amp; Fragmentation</a:t>
             </a:r>
           </a:p>
         </p:txBody>
@@ -3451,7 +3590,7 @@
         </p:nvSpPr>
         <p:spPr>
           <a:xfrm>
-            <a:off x="731520" y="1280160"/>
+            <a:off x="731520" y="1234440"/>
             <a:ext cx="6858000" cy="4937760"/>
           </a:xfrm>
           <a:prstGeom prst="rect">
@@ -3469,29 +3608,29 @@
               <a:spcAft>
                 <a:spcPts val="200"/>
               </a:spcAft>
-              <a:defRPr b="1" sz="1500">
+              <a:defRPr b="1" sz="1450">
                 <a:solidFill>
                   <a:srgbClr val="0F1E4A"/>
                 </a:solidFill>
               </a:defRPr>
             </a:pPr>
             <a:r>
-              <a:t>• Base Header Length</a:t>
+              <a:t>• IPv4 Header Structure (20 to 60 Bytes)</a:t>
             </a:r>
           </a:p>
           <a:p>
             <a:pPr>
               <a:spcAft>
-                <a:spcPts val="800"/>
+                <a:spcPts val="700"/>
               </a:spcAft>
-              <a:defRPr sz="1300">
-                <a:solidFill>
-                  <a:srgbClr val="1E293B"/>
-                </a:solidFill>
-              </a:defRPr>
-            </a:pPr>
-            <a:r>
-              <a:t>   20 to 60 bytes (minimum 20 bytes when options are absent).</a:t>
+              <a:defRPr sz="1250">
+                <a:solidFill>
+                  <a:srgbClr val="0F172A"/>
+                </a:solidFill>
+              </a:defRPr>
+            </a:pPr>
+            <a:r>
+              <a:t>   Version (4b: 4) | IHL (4b: Header length in 32-bit words, min 5 = 20B) | DSCP/ECN (8b: QoS) | Total Length (16b: Header + Payload, max 65535B) \n Identification (16b) | Flags (3b: Reserved, DF, MF) | Fragment Offset (13b: measured in 8-byte units) \n TTL (8b: Time-to-Live, decremented per hop) | Protocol (8b: ICMP=1, TCP=6, UDP=17) | Header Checksum (16b) \n Source IP (32b) \n Destination IP (32b) \n Options (0-40B).</a:t>
             </a:r>
           </a:p>
           <a:p>
@@ -3499,29 +3638,29 @@
               <a:spcAft>
                 <a:spcPts val="200"/>
               </a:spcAft>
-              <a:defRPr b="1" sz="1500">
+              <a:defRPr b="1" sz="1450">
                 <a:solidFill>
                   <a:srgbClr val="0F1E4A"/>
                 </a:solidFill>
               </a:defRPr>
             </a:pPr>
             <a:r>
-              <a:t>• Version (4b) &amp; IHL (4b)</a:t>
+              <a:t>• Fragmentation Fields</a:t>
             </a:r>
           </a:p>
           <a:p>
             <a:pPr>
               <a:spcAft>
-                <a:spcPts val="800"/>
+                <a:spcPts val="700"/>
               </a:spcAft>
-              <a:defRPr sz="1300">
-                <a:solidFill>
-                  <a:srgbClr val="1E293B"/>
-                </a:solidFill>
-              </a:defRPr>
-            </a:pPr>
-            <a:r>
-              <a:t>   Version 4; Internet Header Length (IHL) in 32-bit words (e.g. 5 = 20 bytes).</a:t>
+              <a:defRPr sz="1250">
+                <a:solidFill>
+                  <a:srgbClr val="0F172A"/>
+                </a:solidFill>
+              </a:defRPr>
+            </a:pPr>
+            <a:r>
+              <a:t>   **Identification**: Identifies fragments belonging to same original datagram. **DF (Don't Fragment)**: If set to 1, router drops packet if larger than MTU. **MF (More Fragments)**: 1 for all fragments except the final one (0). **Fragment Offset**: Byte offset divided by 8.</a:t>
             </a:r>
           </a:p>
           <a:p>
@@ -3529,149 +3668,29 @@
               <a:spcAft>
                 <a:spcPts val="200"/>
               </a:spcAft>
-              <a:defRPr b="1" sz="1500">
+              <a:defRPr b="1" sz="1450">
                 <a:solidFill>
                   <a:srgbClr val="0F1E4A"/>
                 </a:solidFill>
               </a:defRPr>
             </a:pPr>
             <a:r>
-              <a:t>• Type of Service / DiffServ (8b)</a:t>
+              <a:t>• Reassembly</a:t>
             </a:r>
           </a:p>
           <a:p>
             <a:pPr>
               <a:spcAft>
-                <a:spcPts val="800"/>
+                <a:spcPts val="700"/>
               </a:spcAft>
-              <a:defRPr sz="1300">
-                <a:solidFill>
-                  <a:srgbClr val="1E293B"/>
-                </a:solidFill>
-              </a:defRPr>
-            </a:pPr>
-            <a:r>
-              <a:t>   QoS classification and Explicit Congestion Notification (ECN).</a:t>
-            </a:r>
-          </a:p>
-          <a:p>
-            <a:pPr>
-              <a:spcAft>
-                <a:spcPts val="200"/>
-              </a:spcAft>
-              <a:defRPr b="1" sz="1500">
-                <a:solidFill>
-                  <a:srgbClr val="0F1E4A"/>
-                </a:solidFill>
-              </a:defRPr>
-            </a:pPr>
-            <a:r>
-              <a:t>• Total Length (16b)</a:t>
-            </a:r>
-          </a:p>
-          <a:p>
-            <a:pPr>
-              <a:spcAft>
-                <a:spcPts val="800"/>
-              </a:spcAft>
-              <a:defRPr sz="1300">
-                <a:solidFill>
-                  <a:srgbClr val="1E293B"/>
-                </a:solidFill>
-              </a:defRPr>
-            </a:pPr>
-            <a:r>
-              <a:t>   Total length of datagram in bytes (Header + Payload). Max 65,535 bytes.</a:t>
-            </a:r>
-          </a:p>
-          <a:p>
-            <a:pPr>
-              <a:spcAft>
-                <a:spcPts val="200"/>
-              </a:spcAft>
-              <a:defRPr b="1" sz="1500">
-                <a:solidFill>
-                  <a:srgbClr val="0F1E4A"/>
-                </a:solidFill>
-              </a:defRPr>
-            </a:pPr>
-            <a:r>
-              <a:t>• Fragmentation Fields (32b)</a:t>
-            </a:r>
-          </a:p>
-          <a:p>
-            <a:pPr>
-              <a:spcAft>
-                <a:spcPts val="800"/>
-              </a:spcAft>
-              <a:defRPr sz="1300">
-                <a:solidFill>
-                  <a:srgbClr val="1E293B"/>
-                </a:solidFill>
-              </a:defRPr>
-            </a:pPr>
-            <a:r>
-              <a:t>   Identification (16b: groups fragments), Flags (3b: Reserved, DF = Don't Fragment, MF = More Fragments), Fragment Offset (13b: measured in 8-byte units).</a:t>
-            </a:r>
-          </a:p>
-          <a:p>
-            <a:pPr>
-              <a:spcAft>
-                <a:spcPts val="200"/>
-              </a:spcAft>
-              <a:defRPr b="1" sz="1500">
-                <a:solidFill>
-                  <a:srgbClr val="0F1E4A"/>
-                </a:solidFill>
-              </a:defRPr>
-            </a:pPr>
-            <a:r>
-              <a:t>• Time to Live (TTL - 8b)</a:t>
-            </a:r>
-          </a:p>
-          <a:p>
-            <a:pPr>
-              <a:spcAft>
-                <a:spcPts val="800"/>
-              </a:spcAft>
-              <a:defRPr sz="1300">
-                <a:solidFill>
-                  <a:srgbClr val="1E293B"/>
-                </a:solidFill>
-              </a:defRPr>
-            </a:pPr>
-            <a:r>
-              <a:t>   Decremented by 1 at each router hop to prevent infinite routing loops. Dropped when TTL = 0 (triggers ICMP Time Exceeded).</a:t>
-            </a:r>
-          </a:p>
-          <a:p>
-            <a:pPr>
-              <a:spcAft>
-                <a:spcPts val="200"/>
-              </a:spcAft>
-              <a:defRPr b="1" sz="1500">
-                <a:solidFill>
-                  <a:srgbClr val="0F1E4A"/>
-                </a:solidFill>
-              </a:defRPr>
-            </a:pPr>
-            <a:r>
-              <a:t>• Protocol (8b) &amp; Checksum (16b)</a:t>
-            </a:r>
-          </a:p>
-          <a:p>
-            <a:pPr>
-              <a:spcAft>
-                <a:spcPts val="800"/>
-              </a:spcAft>
-              <a:defRPr sz="1300">
-                <a:solidFill>
-                  <a:srgbClr val="1E293B"/>
-                </a:solidFill>
-              </a:defRPr>
-            </a:pPr>
-            <a:r>
-              <a:t>   Protocol number: `6` for TCP, `17` for UDP, `1` for ICMP. Checksum verified over header only.</a:t>
+              <a:defRPr sz="1250">
+                <a:solidFill>
+                  <a:srgbClr val="0F172A"/>
+                </a:solidFill>
+              </a:defRPr>
+            </a:pPr>
+            <a:r>
+              <a:t>   Occurs strictly at the final destination host before delivering to the transport layer.</a:t>
             </a:r>
           </a:p>
         </p:txBody>
@@ -3684,14 +3703,14 @@
         </p:nvSpPr>
         <p:spPr>
           <a:xfrm>
-            <a:off x="7955279" y="1280160"/>
-            <a:ext cx="3566160" cy="4846320"/>
+            <a:off x="7955279" y="1234440"/>
+            <a:ext cx="3566160" cy="4892040"/>
           </a:xfrm>
           <a:prstGeom prst="roundRect">
             <a:avLst/>
           </a:prstGeom>
           <a:solidFill>
-            <a:srgbClr val="F1F5F9"/>
+            <a:srgbClr val="F8FAFC"/>
           </a:solidFill>
           <a:ln w="19050">
             <a:solidFill>
@@ -3729,7 +3748,7 @@
         </p:nvSpPr>
         <p:spPr>
           <a:xfrm>
-            <a:off x="8138160" y="1417320"/>
+            <a:off x="8138160" y="1371600"/>
             <a:ext cx="3200400" cy="4572000"/>
           </a:xfrm>
           <a:prstGeom prst="rect">
@@ -3754,7 +3773,7 @@
               </a:defRPr>
             </a:pPr>
             <a:r>
-              <a:t>IPv4 Key Fields</a:t>
+              <a:t>Key Header Fields</a:t>
             </a:r>
           </a:p>
           <a:p>
@@ -3764,12 +3783,12 @@
               </a:spcAft>
               <a:defRPr sz="1200">
                 <a:solidFill>
-                  <a:srgbClr val="1E293B"/>
-                </a:solidFill>
-              </a:defRPr>
-            </a:pPr>
-            <a:r>
-              <a:t>→ Base Header: 20 Bytes</a:t>
+                  <a:srgbClr val="0F172A"/>
+                </a:solidFill>
+              </a:defRPr>
+            </a:pPr>
+            <a:r>
+              <a:t>→ IHL: Header words (x4 bytes)</a:t>
             </a:r>
           </a:p>
           <a:p>
@@ -3779,12 +3798,12 @@
               </a:spcAft>
               <a:defRPr sz="1200">
                 <a:solidFill>
-                  <a:srgbClr val="1E293B"/>
-                </a:solidFill>
-              </a:defRPr>
-            </a:pPr>
-            <a:r>
-              <a:t>→ TTL: Loop prevention</a:t>
+                  <a:srgbClr val="0F172A"/>
+                </a:solidFill>
+              </a:defRPr>
+            </a:pPr>
+            <a:r>
+              <a:t>→ Total Length: Max 65,535 B</a:t>
             </a:r>
           </a:p>
           <a:p>
@@ -3794,12 +3813,12 @@
               </a:spcAft>
               <a:defRPr sz="1200">
                 <a:solidFill>
-                  <a:srgbClr val="1E293B"/>
-                </a:solidFill>
-              </a:defRPr>
-            </a:pPr>
-            <a:r>
-              <a:t>→ Protocol 6: TCP | 17: UDP</a:t>
+                  <a:srgbClr val="0F172A"/>
+                </a:solidFill>
+              </a:defRPr>
+            </a:pPr>
+            <a:r>
+              <a:t>→ TTL: Prevents routing loops</a:t>
             </a:r>
           </a:p>
           <a:p>
@@ -3809,12 +3828,12 @@
               </a:spcAft>
               <a:defRPr sz="1200">
                 <a:solidFill>
-                  <a:srgbClr val="1E293B"/>
-                </a:solidFill>
-              </a:defRPr>
-            </a:pPr>
-            <a:r>
-              <a:t>→ Offset: Measured in 8-byte blocks</a:t>
+                  <a:srgbClr val="0F172A"/>
+                </a:solidFill>
+              </a:defRPr>
+            </a:pPr>
+            <a:r>
+              <a:t>→ Protocol: 6=TCP, 17=UDP, 1=ICMP</a:t>
             </a:r>
           </a:p>
           <a:p>
@@ -3824,12 +3843,12 @@
               </a:spcAft>
               <a:defRPr sz="1200">
                 <a:solidFill>
-                  <a:srgbClr val="1E293B"/>
-                </a:solidFill>
-              </a:defRPr>
-            </a:pPr>
-            <a:r>
-              <a:t>→ DF=1: Drop if MTU exceeded</a:t>
+                  <a:srgbClr val="0F172A"/>
+                </a:solidFill>
+              </a:defRPr>
+            </a:pPr>
+            <a:r>
+              <a:t>→ Offset unit = 8 Bytes</a:t>
             </a:r>
           </a:p>
         </p:txBody>
@@ -3842,8 +3861,8 @@
         </p:nvSpPr>
         <p:spPr>
           <a:xfrm>
-            <a:off x="731520" y="6309360"/>
-            <a:ext cx="10789920" cy="365760"/>
+            <a:off x="731520" y="6327648"/>
+            <a:ext cx="10789920" cy="320040"/>
           </a:xfrm>
           <a:prstGeom prst="rect">
             <a:avLst/>
@@ -3865,6 +3884,41 @@
             </a:pPr>
             <a:r>
               <a:t>PCCST501 Computer Networks | KTU 2024 Scheme | Prof. Anju Markose | Assistant Professor, Dept. of CSE | VJCET</a:t>
+            </a:r>
+          </a:p>
+        </p:txBody>
+      </p:sp>
+      <p:sp>
+        <p:nvSpPr>
+          <p:cNvPr id="10" name="TextBox 9"/>
+          <p:cNvSpPr txBox="1"/>
+          <p:nvPr/>
+        </p:nvSpPr>
+        <p:spPr>
+          <a:xfrm>
+            <a:off x="6858000" y="6327648"/>
+            <a:ext cx="4572000" cy="320040"/>
+          </a:xfrm>
+          <a:prstGeom prst="rect">
+            <a:avLst/>
+          </a:prstGeom>
+          <a:noFill/>
+        </p:spPr>
+        <p:txBody>
+          <a:bodyPr wrap="none">
+            <a:spAutoFit/>
+          </a:bodyPr>
+          <a:lstStyle/>
+          <a:p>
+            <a:pPr algn="r">
+              <a:defRPr sz="950">
+                <a:solidFill>
+                  <a:srgbClr val="64748B"/>
+                </a:solidFill>
+              </a:defRPr>
+            </a:pPr>
+            <a:r>
+              <a:t>Dept. of CSE, VJCET</a:t>
             </a:r>
           </a:p>
         </p:txBody>
@@ -3996,14 +4050,14 @@
           <a:lstStyle/>
           <a:p>
             <a:pPr>
-              <a:defRPr b="1" sz="2300">
+              <a:defRPr b="1" sz="2200">
                 <a:solidFill>
                   <a:srgbClr val="F8FAFC"/>
                 </a:solidFill>
               </a:defRPr>
             </a:pPr>
             <a:r>
-              <a:t>2.2.2.2 Subnetting, CIDR &amp; VLSM Formulas</a:t>
+              <a:t>2.2.2.2 Worked KTU Numerical: IPv4 Fragmentation</a:t>
             </a:r>
           </a:p>
         </p:txBody>
@@ -4038,204 +4092,31 @@
               </a:defRPr>
             </a:pPr>
             <a:r>
-              <a:t>M2.2.2 SUBNETTING &amp; CIDR</a:t>
-            </a:r>
-          </a:p>
-        </p:txBody>
-      </p:sp>
-      <p:sp>
-        <p:nvSpPr>
-          <p:cNvPr id="6" name="TextBox 5"/>
-          <p:cNvSpPr txBox="1"/>
-          <p:nvPr/>
-        </p:nvSpPr>
-        <p:spPr>
-          <a:xfrm>
-            <a:off x="731520" y="1280160"/>
-            <a:ext cx="6858000" cy="4937760"/>
-          </a:xfrm>
-          <a:prstGeom prst="rect">
-            <a:avLst/>
-          </a:prstGeom>
-          <a:noFill/>
-        </p:spPr>
-        <p:txBody>
-          <a:bodyPr wrap="square">
-            <a:spAutoFit/>
-          </a:bodyPr>
-          <a:lstStyle/>
-          <a:p>
-            <a:pPr>
-              <a:spcAft>
-                <a:spcPts val="200"/>
-              </a:spcAft>
-              <a:defRPr b="1" sz="1500">
-                <a:solidFill>
-                  <a:srgbClr val="0F1E4A"/>
-                </a:solidFill>
-              </a:defRPr>
-            </a:pPr>
-            <a:r>
-              <a:t>• Classless Inter-Domain Routing (CIDR)</a:t>
-            </a:r>
-          </a:p>
-          <a:p>
-            <a:pPr>
-              <a:spcAft>
-                <a:spcPts val="800"/>
-              </a:spcAft>
-              <a:defRPr sz="1300">
-                <a:solidFill>
-                  <a:srgbClr val="1E293B"/>
-                </a:solidFill>
-              </a:defRPr>
-            </a:pPr>
-            <a:r>
-              <a:t>   Replaced Class A, B, C addressing. Format: `a.b.c.d/x`, where `/x` is the prefix length (network bits) and `32 - x` are host bits.</a:t>
-            </a:r>
-          </a:p>
-          <a:p>
-            <a:pPr>
-              <a:spcAft>
-                <a:spcPts val="200"/>
-              </a:spcAft>
-              <a:defRPr b="1" sz="1500">
-                <a:solidFill>
-                  <a:srgbClr val="0F1E4A"/>
-                </a:solidFill>
-              </a:defRPr>
-            </a:pPr>
-            <a:r>
-              <a:t>• Subnet Mask</a:t>
-            </a:r>
-          </a:p>
-          <a:p>
-            <a:pPr>
-              <a:spcAft>
-                <a:spcPts val="800"/>
-              </a:spcAft>
-              <a:defRPr sz="1300">
-                <a:solidFill>
-                  <a:srgbClr val="1E293B"/>
-                </a:solidFill>
-              </a:defRPr>
-            </a:pPr>
-            <a:r>
-              <a:t>   32-bit value with `/x` contiguous 1s followed by `32 - x` zeros (e.g. `/24` = `255.255.255.0`).</a:t>
-            </a:r>
-          </a:p>
-          <a:p>
-            <a:pPr>
-              <a:spcAft>
-                <a:spcPts val="200"/>
-              </a:spcAft>
-              <a:defRPr b="1" sz="1500">
-                <a:solidFill>
-                  <a:srgbClr val="0F1E4A"/>
-                </a:solidFill>
-              </a:defRPr>
-            </a:pPr>
-            <a:r>
-              <a:t>• Number of Usable Hosts Formula</a:t>
-            </a:r>
-          </a:p>
-          <a:p>
-            <a:pPr>
-              <a:spcAft>
-                <a:spcPts val="800"/>
-              </a:spcAft>
-              <a:defRPr sz="1300">
-                <a:solidFill>
-                  <a:srgbClr val="1E293B"/>
-                </a:solidFill>
-              </a:defRPr>
-            </a:pPr>
-            <a:r>
-              <a:t>   Total hosts in subnet $= 2^{(32 - x)} - 2$ (Subtract 2 because all host bits 0 = Network Address, all host bits 1 = Directed Broadcast Address).</a:t>
-            </a:r>
-          </a:p>
-          <a:p>
-            <a:pPr>
-              <a:spcAft>
-                <a:spcPts val="200"/>
-              </a:spcAft>
-              <a:defRPr b="1" sz="1500">
-                <a:solidFill>
-                  <a:srgbClr val="0F1E4A"/>
-                </a:solidFill>
-              </a:defRPr>
-            </a:pPr>
-            <a:r>
-              <a:t>• Subnet Splitting Formula</a:t>
-            </a:r>
-          </a:p>
-          <a:p>
-            <a:pPr>
-              <a:spcAft>
-                <a:spcPts val="800"/>
-              </a:spcAft>
-              <a:defRPr sz="1300">
-                <a:solidFill>
-                  <a:srgbClr val="1E293B"/>
-                </a:solidFill>
-              </a:defRPr>
-            </a:pPr>
-            <a:r>
-              <a:t>   Borrowing $k$ bits from host portion creates $2^k$ new subnets, each with prefix length $x + k$.</a:t>
-            </a:r>
-          </a:p>
-          <a:p>
-            <a:pPr>
-              <a:spcAft>
-                <a:spcPts val="200"/>
-              </a:spcAft>
-              <a:defRPr b="1" sz="1500">
-                <a:solidFill>
-                  <a:srgbClr val="0F1E4A"/>
-                </a:solidFill>
-              </a:defRPr>
-            </a:pPr>
-            <a:r>
-              <a:t>• Variable Length Subnet Masking (VLSM)</a:t>
-            </a:r>
-          </a:p>
-          <a:p>
-            <a:pPr>
-              <a:spcAft>
-                <a:spcPts val="800"/>
-              </a:spcAft>
-              <a:defRPr sz="1300">
-                <a:solidFill>
-                  <a:srgbClr val="1E293B"/>
-                </a:solidFill>
-              </a:defRPr>
-            </a:pPr>
-            <a:r>
-              <a:t>   Allows dividing an IP block into subnets of different sizes matching exact department host requirements, eliminating address wastage.</a:t>
-            </a:r>
-          </a:p>
-        </p:txBody>
-      </p:sp>
-      <p:sp>
-        <p:nvSpPr>
-          <p:cNvPr id="7" name="Rounded Rectangle 6"/>
+              <a:t>M2.2.2 FRAGMENTATION PROBLEM</a:t>
+            </a:r>
+          </a:p>
+        </p:txBody>
+      </p:sp>
+      <p:sp>
+        <p:nvSpPr>
+          <p:cNvPr id="6" name="Rounded Rectangle 5"/>
           <p:cNvSpPr/>
           <p:nvPr/>
         </p:nvSpPr>
         <p:spPr>
           <a:xfrm>
-            <a:off x="7955279" y="1280160"/>
-            <a:ext cx="3566160" cy="4846320"/>
+            <a:off x="731520" y="1234440"/>
+            <a:ext cx="5486400" cy="4892040"/>
           </a:xfrm>
           <a:prstGeom prst="roundRect">
             <a:avLst/>
           </a:prstGeom>
           <a:solidFill>
-            <a:srgbClr val="F1F5F9"/>
+            <a:srgbClr val="F8FAFC"/>
           </a:solidFill>
           <a:ln w="19050">
             <a:solidFill>
-              <a:srgbClr val="0E7490"/>
+              <a:srgbClr val="0F1E4A"/>
             </a:solidFill>
           </a:ln>
         </p:spPr>
@@ -4263,14 +4144,14 @@
       </p:sp>
       <p:sp>
         <p:nvSpPr>
-          <p:cNvPr id="8" name="TextBox 7"/>
+          <p:cNvPr id="7" name="TextBox 6"/>
           <p:cNvSpPr txBox="1"/>
           <p:nvPr/>
         </p:nvSpPr>
         <p:spPr>
           <a:xfrm>
-            <a:off x="8138160" y="1417320"/>
-            <a:ext cx="3200400" cy="4572000"/>
+            <a:off x="914400" y="1371600"/>
+            <a:ext cx="5120640" cy="4572000"/>
           </a:xfrm>
           <a:prstGeom prst="rect">
             <a:avLst/>
@@ -4285,16 +4166,31 @@
           <a:p>
             <a:pPr>
               <a:spcAft>
-                <a:spcPts val="1000"/>
+                <a:spcPts val="800"/>
               </a:spcAft>
-              <a:defRPr b="1" sz="1500">
-                <a:solidFill>
-                  <a:srgbClr val="0E7490"/>
-                </a:solidFill>
-              </a:defRPr>
-            </a:pPr>
-            <a:r>
-              <a:t>Subnet Formulas</a:t>
+              <a:defRPr b="1" sz="1450">
+                <a:solidFill>
+                  <a:srgbClr val="0F1E4A"/>
+                </a:solidFill>
+              </a:defRPr>
+            </a:pPr>
+            <a:r>
+              <a:t>📌 KTU Numerical Problem Statement</a:t>
+            </a:r>
+          </a:p>
+          <a:p>
+            <a:pPr>
+              <a:spcAft>
+                <a:spcPts val="1400"/>
+              </a:spcAft>
+              <a:defRPr sz="1250">
+                <a:solidFill>
+                  <a:srgbClr val="0F172A"/>
+                </a:solidFill>
+              </a:defRPr>
+            </a:pPr>
+            <a:r>
+              <a:t>An IPv4 datagram with Total Length = 4000 bytes (20-byte IP header + 3980 bytes payload) arrives at a router whose outgoing link has Maximum Transmission Unit MTU = 1500 bytes. Calculate the Total Length, Payload Length, MF flag, and Fragment Offset for all resulting fragments.</a:t>
             </a:r>
           </a:p>
           <a:p>
@@ -4302,75 +4198,120 @@
               <a:spcAft>
                 <a:spcPts val="600"/>
               </a:spcAft>
-              <a:defRPr sz="1200">
-                <a:solidFill>
-                  <a:srgbClr val="1E293B"/>
-                </a:solidFill>
-              </a:defRPr>
-            </a:pPr>
-            <a:r>
-              <a:t>→ Host Bits: h = 32 - prefix</a:t>
+              <a:defRPr b="1" sz="1350">
+                <a:solidFill>
+                  <a:srgbClr val="0E7490"/>
+                </a:solidFill>
+              </a:defRPr>
+            </a:pPr>
+            <a:r>
+              <a:t>📐 Governing Formulas &amp; Principles:</a:t>
             </a:r>
           </a:p>
           <a:p>
             <a:pPr>
               <a:spcAft>
-                <a:spcPts val="600"/>
+                <a:spcPts val="400"/>
               </a:spcAft>
               <a:defRPr sz="1200">
                 <a:solidFill>
-                  <a:srgbClr val="1E293B"/>
-                </a:solidFill>
-              </a:defRPr>
-            </a:pPr>
-            <a:r>
-              <a:t>→ Usable Hosts = 2^h - 2</a:t>
+                  <a:srgbClr val="0F172A"/>
+                </a:solidFill>
+              </a:defRPr>
+            </a:pPr>
+            <a:r>
+              <a:t>• MTU = 1500 bytes (Max payload per fragment = 1500 - 20 = 1480 bytes).</a:t>
             </a:r>
           </a:p>
           <a:p>
             <a:pPr>
               <a:spcAft>
-                <a:spcPts val="600"/>
+                <a:spcPts val="400"/>
               </a:spcAft>
               <a:defRPr sz="1200">
                 <a:solidFill>
-                  <a:srgbClr val="1E293B"/>
-                </a:solidFill>
-              </a:defRPr>
-            </a:pPr>
-            <a:r>
-              <a:t>→ New Subnets = 2^(borrowed bits)</a:t>
+                  <a:srgbClr val="0F172A"/>
+                </a:solidFill>
+              </a:defRPr>
+            </a:pPr>
+            <a:r>
+              <a:t>• 1480 is divisible by 8 (1480 / 8 = 185) -&gt; Valid maximum payload per fragment.</a:t>
             </a:r>
           </a:p>
           <a:p>
             <a:pPr>
               <a:spcAft>
-                <a:spcPts val="600"/>
+                <a:spcPts val="400"/>
               </a:spcAft>
               <a:defRPr sz="1200">
                 <a:solidFill>
-                  <a:srgbClr val="1E293B"/>
-                </a:solidFill>
-              </a:defRPr>
-            </a:pPr>
-            <a:r>
-              <a:t>→ Network Addr: Host bits = 0</a:t>
+                  <a:srgbClr val="0F172A"/>
+                </a:solidFill>
+              </a:defRPr>
+            </a:pPr>
+            <a:r>
+              <a:t>• Total payload to fragment = 3980 bytes.</a:t>
             </a:r>
           </a:p>
           <a:p>
             <a:pPr>
               <a:spcAft>
-                <a:spcPts val="600"/>
+                <a:spcPts val="400"/>
               </a:spcAft>
               <a:defRPr sz="1200">
                 <a:solidFill>
-                  <a:srgbClr val="1E293B"/>
-                </a:solidFill>
-              </a:defRPr>
-            </a:pPr>
-            <a:r>
-              <a:t>→ Broadcast Addr: Host bits = 1</a:t>
-            </a:r>
+                  <a:srgbClr val="0F172A"/>
+                </a:solidFill>
+              </a:defRPr>
+            </a:pPr>
+            <a:r>
+              <a:t>• Fragment Offset = Total previous payload bytes divided by 8.</a:t>
+            </a:r>
+          </a:p>
+        </p:txBody>
+      </p:sp>
+      <p:sp>
+        <p:nvSpPr>
+          <p:cNvPr id="8" name="Rounded Rectangle 7"/>
+          <p:cNvSpPr/>
+          <p:nvPr/>
+        </p:nvSpPr>
+        <p:spPr>
+          <a:xfrm>
+            <a:off x="6492240" y="1234440"/>
+            <a:ext cx="5029200" cy="4892040"/>
+          </a:xfrm>
+          <a:prstGeom prst="roundRect">
+            <a:avLst/>
+          </a:prstGeom>
+          <a:solidFill>
+            <a:srgbClr val="ECFDF5"/>
+          </a:solidFill>
+          <a:ln w="19050">
+            <a:solidFill>
+              <a:srgbClr val="10B981"/>
+            </a:solidFill>
+          </a:ln>
+        </p:spPr>
+        <p:style>
+          <a:lnRef idx="1">
+            <a:schemeClr val="accent1"/>
+          </a:lnRef>
+          <a:fillRef idx="3">
+            <a:schemeClr val="accent1"/>
+          </a:fillRef>
+          <a:effectRef idx="2">
+            <a:schemeClr val="accent1"/>
+          </a:effectRef>
+          <a:fontRef idx="minor">
+            <a:schemeClr val="lt1"/>
+          </a:fontRef>
+        </p:style>
+        <p:txBody>
+          <a:bodyPr rtlCol="0" anchor="ctr"/>
+          <a:lstStyle/>
+          <a:p>
+            <a:pPr algn="ctr"/>
           </a:p>
         </p:txBody>
       </p:sp>
@@ -4382,8 +4323,8 @@
         </p:nvSpPr>
         <p:spPr>
           <a:xfrm>
-            <a:off x="731520" y="6309360"/>
-            <a:ext cx="10789920" cy="365760"/>
+            <a:off x="6675120" y="1371600"/>
+            <a:ext cx="4663440" cy="4572000"/>
           </a:xfrm>
           <a:prstGeom prst="rect">
             <a:avLst/>
@@ -4391,6 +4332,131 @@
           <a:noFill/>
         </p:spPr>
         <p:txBody>
+          <a:bodyPr wrap="square">
+            <a:spAutoFit/>
+          </a:bodyPr>
+          <a:lstStyle/>
+          <a:p>
+            <a:pPr>
+              <a:spcAft>
+                <a:spcPts val="800"/>
+              </a:spcAft>
+              <a:defRPr b="1" sz="1450">
+                <a:solidFill>
+                  <a:srgbClr val="047857"/>
+                </a:solidFill>
+              </a:defRPr>
+            </a:pPr>
+            <a:r>
+              <a:t>📝 Step-by-Step Derivation &amp; Solution</a:t>
+            </a:r>
+          </a:p>
+          <a:p>
+            <a:pPr>
+              <a:spcAft>
+                <a:spcPts val="500"/>
+              </a:spcAft>
+              <a:defRPr sz="1200">
+                <a:solidFill>
+                  <a:srgbClr val="0F172A"/>
+                </a:solidFill>
+              </a:defRPr>
+            </a:pPr>
+            <a:r>
+              <a:t>Step 1: Frag 1: Header = 20 B, Payload = 1480 B, Total Length = 1500 B, MF = 1, Offset = 0 / 8 = 0</a:t>
+            </a:r>
+          </a:p>
+          <a:p>
+            <a:pPr>
+              <a:spcAft>
+                <a:spcPts val="500"/>
+              </a:spcAft>
+              <a:defRPr sz="1200">
+                <a:solidFill>
+                  <a:srgbClr val="0F172A"/>
+                </a:solidFill>
+              </a:defRPr>
+            </a:pPr>
+            <a:r>
+              <a:t>Step 2: Frag 2: Header = 20 B, Payload = 1480 B, Total Length = 1500 B, MF = 1, Offset = 1480 / 8 = 185</a:t>
+            </a:r>
+          </a:p>
+          <a:p>
+            <a:pPr>
+              <a:spcAft>
+                <a:spcPts val="500"/>
+              </a:spcAft>
+              <a:defRPr sz="1200">
+                <a:solidFill>
+                  <a:srgbClr val="0F172A"/>
+                </a:solidFill>
+              </a:defRPr>
+            </a:pPr>
+            <a:r>
+              <a:t>Step 3: Remaining payload = 3980 - 1480 - 1480 = 1020 B.</a:t>
+            </a:r>
+          </a:p>
+          <a:p>
+            <a:pPr>
+              <a:spcAft>
+                <a:spcPts val="500"/>
+              </a:spcAft>
+              <a:defRPr sz="1200">
+                <a:solidFill>
+                  <a:srgbClr val="0F172A"/>
+                </a:solidFill>
+              </a:defRPr>
+            </a:pPr>
+            <a:r>
+              <a:t>Step 4: Frag 3: Header = 20 B, Payload = 1020 B, Total Length = 1040 B, MF = 0 (last fragment!), Offset = 2960 / 8 = 370</a:t>
+            </a:r>
+          </a:p>
+          <a:p>
+            <a:pPr>
+              <a:spcAft>
+                <a:spcPts val="800"/>
+              </a:spcAft>
+              <a:defRPr b="1" sz="1300">
+                <a:solidFill>
+                  <a:srgbClr val="047857"/>
+                </a:solidFill>
+              </a:defRPr>
+            </a:pPr>
+            <a:r>
+              <a:t>✅ FINAL ANSWER: Frag 1: Len 1500, MF=1, Off=0 | Frag 2: Len 1500, MF=1, Off=185 | Frag 3: Len 1040, MF=0, Off=370</a:t>
+            </a:r>
+          </a:p>
+          <a:p>
+            <a:pPr>
+              <a:defRPr sz="1100">
+                <a:solidFill>
+                  <a:srgbClr val="64748B"/>
+                </a:solidFill>
+              </a:defRPr>
+            </a:pPr>
+            <a:r>
+              <a:t>💡 Exam Tip: Always verify that Fragment Offset values are integer multiples of 8 bytes!</a:t>
+            </a:r>
+          </a:p>
+        </p:txBody>
+      </p:sp>
+      <p:sp>
+        <p:nvSpPr>
+          <p:cNvPr id="10" name="TextBox 9"/>
+          <p:cNvSpPr txBox="1"/>
+          <p:nvPr/>
+        </p:nvSpPr>
+        <p:spPr>
+          <a:xfrm>
+            <a:off x="731520" y="6327648"/>
+            <a:ext cx="10789920" cy="320040"/>
+          </a:xfrm>
+          <a:prstGeom prst="rect">
+            <a:avLst/>
+          </a:prstGeom>
+          <a:noFill/>
+        </p:spPr>
+        <p:txBody>
           <a:bodyPr wrap="none">
             <a:spAutoFit/>
           </a:bodyPr>
@@ -4405,6 +4471,41 @@
             </a:pPr>
             <a:r>
               <a:t>PCCST501 Computer Networks | KTU 2024 Scheme | Prof. Anju Markose | Assistant Professor, Dept. of CSE | VJCET</a:t>
+            </a:r>
+          </a:p>
+        </p:txBody>
+      </p:sp>
+      <p:sp>
+        <p:nvSpPr>
+          <p:cNvPr id="11" name="TextBox 10"/>
+          <p:cNvSpPr txBox="1"/>
+          <p:nvPr/>
+        </p:nvSpPr>
+        <p:spPr>
+          <a:xfrm>
+            <a:off x="6858000" y="6327648"/>
+            <a:ext cx="4572000" cy="320040"/>
+          </a:xfrm>
+          <a:prstGeom prst="rect">
+            <a:avLst/>
+          </a:prstGeom>
+          <a:noFill/>
+        </p:spPr>
+        <p:txBody>
+          <a:bodyPr wrap="none">
+            <a:spAutoFit/>
+          </a:bodyPr>
+          <a:lstStyle/>
+          <a:p>
+            <a:pPr algn="r">
+              <a:defRPr sz="950">
+                <a:solidFill>
+                  <a:srgbClr val="64748B"/>
+                </a:solidFill>
+              </a:defRPr>
+            </a:pPr>
+            <a:r>
+              <a:t>Dept. of CSE, VJCET</a:t>
             </a:r>
           </a:p>
         </p:txBody>
@@ -4536,14 +4637,14 @@
           <a:lstStyle/>
           <a:p>
             <a:pPr>
-              <a:defRPr b="1" sz="2300">
+              <a:defRPr b="1" sz="2200">
                 <a:solidFill>
                   <a:srgbClr val="F8FAFC"/>
                 </a:solidFill>
               </a:defRPr>
             </a:pPr>
             <a:r>
-              <a:t>2.2.2.3 Auxiliary Network Layer Protocols</a:t>
+              <a:t>2.2.2.3 Worked KTU Numerical: CIDR Subnetting</a:t>
             </a:r>
           </a:p>
         </p:txBody>
@@ -4578,7 +4679,7 @@
               </a:defRPr>
             </a:pPr>
             <a:r>
-              <a:t>M2.2.2 AUXILIARY PROTOCOLS</a:t>
+              <a:t>M2.2.2 SUBNETTING PROBLEM</a:t>
             </a:r>
           </a:p>
         </p:txBody>
@@ -4591,18 +4692,18 @@
         </p:nvSpPr>
         <p:spPr>
           <a:xfrm>
-            <a:off x="731520" y="1280160"/>
-            <a:ext cx="5212080" cy="4846320"/>
+            <a:off x="731520" y="1234440"/>
+            <a:ext cx="5486400" cy="4892040"/>
           </a:xfrm>
           <a:prstGeom prst="roundRect">
             <a:avLst/>
           </a:prstGeom>
           <a:solidFill>
-            <a:srgbClr val="F1F5F9"/>
+            <a:srgbClr val="F8FAFC"/>
           </a:solidFill>
           <a:ln w="19050">
             <a:solidFill>
-              <a:srgbClr val="0E7490"/>
+              <a:srgbClr val="0F1E4A"/>
             </a:solidFill>
           </a:ln>
         </p:spPr>
@@ -4636,8 +4737,8 @@
         </p:nvSpPr>
         <p:spPr>
           <a:xfrm>
-            <a:off x="914400" y="1417320"/>
-            <a:ext cx="4846320" cy="4572000"/>
+            <a:off x="914400" y="1371600"/>
+            <a:ext cx="5120640" cy="4572000"/>
           </a:xfrm>
           <a:prstGeom prst="rect">
             <a:avLst/>
@@ -4652,16 +4753,31 @@
           <a:p>
             <a:pPr>
               <a:spcAft>
-                <a:spcPts val="1200"/>
+                <a:spcPts val="800"/>
               </a:spcAft>
-              <a:defRPr b="1" sz="1600">
+              <a:defRPr b="1" sz="1450">
                 <a:solidFill>
                   <a:srgbClr val="0F1E4A"/>
                 </a:solidFill>
               </a:defRPr>
             </a:pPr>
             <a:r>
-              <a:t>Control &amp; Management Protocols</a:t>
+              <a:t>📌 KTU Numerical Problem Statement</a:t>
+            </a:r>
+          </a:p>
+          <a:p>
+            <a:pPr>
+              <a:spcAft>
+                <a:spcPts val="1400"/>
+              </a:spcAft>
+              <a:defRPr sz="1250">
+                <a:solidFill>
+                  <a:srgbClr val="0F172A"/>
+                </a:solidFill>
+              </a:defRPr>
+            </a:pPr>
+            <a:r>
+              <a:t>An organization is allocated the block `200.50.16.0/24`. Design 4 equal-sized subnets. For each subnet, specify: (a) Subnet Mask, (b) Network Address, (c) Usable Host Range, (d) Direct Broadcast Address, (e) Maximum usable hosts.</a:t>
             </a:r>
           </a:p>
           <a:p>
@@ -4669,44 +4785,74 @@
               <a:spcAft>
                 <a:spcPts val="600"/>
               </a:spcAft>
-              <a:defRPr sz="1250">
-                <a:solidFill>
-                  <a:srgbClr val="1E293B"/>
-                </a:solidFill>
-              </a:defRPr>
-            </a:pPr>
-            <a:r>
-              <a:t>• ARP (Address Resolution Protocol): Dynamically resolves 32-bit IP address to 48-bit MAC address using broadcast requests and unicast replies</a:t>
+              <a:defRPr b="1" sz="1350">
+                <a:solidFill>
+                  <a:srgbClr val="0E7490"/>
+                </a:solidFill>
+              </a:defRPr>
+            </a:pPr>
+            <a:r>
+              <a:t>📐 Governing Formulas &amp; Principles:</a:t>
             </a:r>
           </a:p>
           <a:p>
             <a:pPr>
               <a:spcAft>
-                <a:spcPts val="600"/>
+                <a:spcPts val="400"/>
               </a:spcAft>
-              <a:defRPr sz="1250">
-                <a:solidFill>
-                  <a:srgbClr val="1E293B"/>
-                </a:solidFill>
-              </a:defRPr>
-            </a:pPr>
-            <a:r>
-              <a:t>• ICMP (Internet Control Message Protocol): Used for error reporting (Destination Unreachable, TTL Expired) and network diagnostics (`ping` Echo, `traceroute`)</a:t>
+              <a:defRPr sz="1200">
+                <a:solidFill>
+                  <a:srgbClr val="0F172A"/>
+                </a:solidFill>
+              </a:defRPr>
+            </a:pPr>
+            <a:r>
+              <a:t>• Given /24 network: 8 host bits (256 addresses).</a:t>
             </a:r>
           </a:p>
           <a:p>
             <a:pPr>
               <a:spcAft>
-                <a:spcPts val="600"/>
+                <a:spcPts val="400"/>
               </a:spcAft>
-              <a:defRPr sz="1250">
-                <a:solidFill>
-                  <a:srgbClr val="1E293B"/>
-                </a:solidFill>
-              </a:defRPr>
-            </a:pPr>
-            <a:r>
-              <a:t>• DHCP (Dynamic Host Configuration): DORA process (Discover, Offer, Request, ACK) dynamically leases IP, mask, default gateway, and DNS servers to booting hosts</a:t>
+              <a:defRPr sz="1200">
+                <a:solidFill>
+                  <a:srgbClr val="0F172A"/>
+                </a:solidFill>
+              </a:defRPr>
+            </a:pPr>
+            <a:r>
+              <a:t>• To create 4 subnets: Need 2 subnet bits (2^2 = 4). New prefix = /24 + 2 = /26.</a:t>
+            </a:r>
+          </a:p>
+          <a:p>
+            <a:pPr>
+              <a:spcAft>
+                <a:spcPts val="400"/>
+              </a:spcAft>
+              <a:defRPr sz="1200">
+                <a:solidFill>
+                  <a:srgbClr val="0F172A"/>
+                </a:solidFill>
+              </a:defRPr>
+            </a:pPr>
+            <a:r>
+              <a:t>• Block size per subnet = 256 / 4 = 64 addresses.</a:t>
+            </a:r>
+          </a:p>
+          <a:p>
+            <a:pPr>
+              <a:spcAft>
+                <a:spcPts val="400"/>
+              </a:spcAft>
+              <a:defRPr sz="1200">
+                <a:solidFill>
+                  <a:srgbClr val="0F172A"/>
+                </a:solidFill>
+              </a:defRPr>
+            </a:pPr>
+            <a:r>
+              <a:t>• Usable hosts per subnet = 2^(32 - 26) - 2 = 64 - 2 = 62 hosts.</a:t>
             </a:r>
           </a:p>
         </p:txBody>
@@ -4719,18 +4865,18 @@
         </p:nvSpPr>
         <p:spPr>
           <a:xfrm>
-            <a:off x="6309360" y="1280160"/>
-            <a:ext cx="5212080" cy="4846320"/>
+            <a:off x="6492240" y="1234440"/>
+            <a:ext cx="5029200" cy="4892040"/>
           </a:xfrm>
           <a:prstGeom prst="roundRect">
             <a:avLst/>
           </a:prstGeom>
           <a:solidFill>
-            <a:srgbClr val="EEF2FF"/>
+            <a:srgbClr val="ECFDF5"/>
           </a:solidFill>
           <a:ln w="19050">
             <a:solidFill>
-              <a:srgbClr val="0F1E4A"/>
+              <a:srgbClr val="10B981"/>
             </a:solidFill>
           </a:ln>
         </p:spPr>
@@ -4764,8 +4910,8 @@
         </p:nvSpPr>
         <p:spPr>
           <a:xfrm>
-            <a:off x="6492240" y="1417320"/>
-            <a:ext cx="4846320" cy="4572000"/>
+            <a:off x="6675120" y="1371600"/>
+            <a:ext cx="4663440" cy="4572000"/>
           </a:xfrm>
           <a:prstGeom prst="rect">
             <a:avLst/>
@@ -4780,46 +4926,118 @@
           <a:p>
             <a:pPr>
               <a:spcAft>
-                <a:spcPts val="1200"/>
+                <a:spcPts val="800"/>
               </a:spcAft>
-              <a:defRPr b="1" sz="1600">
-                <a:solidFill>
-                  <a:srgbClr val="0E7490"/>
-                </a:solidFill>
-              </a:defRPr>
-            </a:pPr>
-            <a:r>
-              <a:t>Address Extension Protocols</a:t>
+              <a:defRPr b="1" sz="1450">
+                <a:solidFill>
+                  <a:srgbClr val="047857"/>
+                </a:solidFill>
+              </a:defRPr>
+            </a:pPr>
+            <a:r>
+              <a:t>📝 Step-by-Step Derivation &amp; Solution</a:t>
             </a:r>
           </a:p>
           <a:p>
             <a:pPr>
               <a:spcAft>
-                <a:spcPts val="600"/>
+                <a:spcPts val="500"/>
               </a:spcAft>
-              <a:defRPr sz="1250">
-                <a:solidFill>
-                  <a:srgbClr val="1E293B"/>
-                </a:solidFill>
-              </a:defRPr>
-            </a:pPr>
-            <a:r>
-              <a:t>• NAT (Network Address Translation): Maps multiple private RFC 1918 IPs (`10.0.0.0/8`, `172.16.0.0/12`, `192.168.0.0/16`) to a single public IP using port multiplexing (NAPT/PAT)</a:t>
+              <a:defRPr sz="1200">
+                <a:solidFill>
+                  <a:srgbClr val="0F172A"/>
+                </a:solidFill>
+              </a:defRPr>
+            </a:pPr>
+            <a:r>
+              <a:t>Step 1: Subnet Mask: 255.255.255.192 (/26)</a:t>
             </a:r>
           </a:p>
           <a:p>
             <a:pPr>
               <a:spcAft>
-                <a:spcPts val="600"/>
+                <a:spcPts val="500"/>
               </a:spcAft>
-              <a:defRPr sz="1250">
-                <a:solidFill>
-                  <a:srgbClr val="1E293B"/>
-                </a:solidFill>
-              </a:defRPr>
-            </a:pPr>
-            <a:r>
-              <a:t>• NAT Translation Table: Maintains `(Private IP, Private Port) &lt;-&gt; (Public IP, NAT Assigned Port)` mappings</a:t>
+              <a:defRPr sz="1200">
+                <a:solidFill>
+                  <a:srgbClr val="0F172A"/>
+                </a:solidFill>
+              </a:defRPr>
+            </a:pPr>
+            <a:r>
+              <a:t>Step 2: Subnet 1: Net = 200.50.16.0/26 | Hosts = 200.50.16.1 to 200.50.16.62 | Broadcast = 200.50.16.63</a:t>
+            </a:r>
+          </a:p>
+          <a:p>
+            <a:pPr>
+              <a:spcAft>
+                <a:spcPts val="500"/>
+              </a:spcAft>
+              <a:defRPr sz="1200">
+                <a:solidFill>
+                  <a:srgbClr val="0F172A"/>
+                </a:solidFill>
+              </a:defRPr>
+            </a:pPr>
+            <a:r>
+              <a:t>Step 3: Subnet 2: Net = 200.50.16.64/26 | Hosts = 200.50.16.65 to 200.50.16.126 | Broadcast = 200.50.16.127</a:t>
+            </a:r>
+          </a:p>
+          <a:p>
+            <a:pPr>
+              <a:spcAft>
+                <a:spcPts val="500"/>
+              </a:spcAft>
+              <a:defRPr sz="1200">
+                <a:solidFill>
+                  <a:srgbClr val="0F172A"/>
+                </a:solidFill>
+              </a:defRPr>
+            </a:pPr>
+            <a:r>
+              <a:t>Step 4: Subnet 3: Net = 200.50.16.128/26 | Hosts = 200.50.16.129 to 200.50.16.190 | Broadcast = 200.50.16.191</a:t>
+            </a:r>
+          </a:p>
+          <a:p>
+            <a:pPr>
+              <a:spcAft>
+                <a:spcPts val="500"/>
+              </a:spcAft>
+              <a:defRPr sz="1200">
+                <a:solidFill>
+                  <a:srgbClr val="0F172A"/>
+                </a:solidFill>
+              </a:defRPr>
+            </a:pPr>
+            <a:r>
+              <a:t>Step 5: Subnet 4: Net = 200.50.16.192/26 | Hosts = 200.50.16.193 to 200.50.16.254 | Broadcast = 200.50.16.255</a:t>
+            </a:r>
+          </a:p>
+          <a:p>
+            <a:pPr>
+              <a:spcAft>
+                <a:spcPts val="800"/>
+              </a:spcAft>
+              <a:defRPr b="1" sz="1300">
+                <a:solidFill>
+                  <a:srgbClr val="047857"/>
+                </a:solidFill>
+              </a:defRPr>
+            </a:pPr>
+            <a:r>
+              <a:t>✅ FINAL ANSWER: 4 Subnets of /26 mask (255.255.255.192), each accommodating 62 usable hosts</a:t>
+            </a:r>
+          </a:p>
+          <a:p>
+            <a:pPr>
+              <a:defRPr sz="1100">
+                <a:solidFill>
+                  <a:srgbClr val="64748B"/>
+                </a:solidFill>
+              </a:defRPr>
+            </a:pPr>
+            <a:r>
+              <a:t>💡 Exam Tip: First address is Network ID; Last address is Directed Broadcast; both cannot be assigned to hosts.</a:t>
             </a:r>
           </a:p>
         </p:txBody>
@@ -4832,8 +5050,8 @@
         </p:nvSpPr>
         <p:spPr>
           <a:xfrm>
-            <a:off x="731520" y="6309360"/>
-            <a:ext cx="10789920" cy="365760"/>
+            <a:off x="731520" y="6327648"/>
+            <a:ext cx="10789920" cy="320040"/>
           </a:xfrm>
           <a:prstGeom prst="rect">
             <a:avLst/>
@@ -4855,6 +5073,541 @@
             </a:pPr>
             <a:r>
               <a:t>PCCST501 Computer Networks | KTU 2024 Scheme | Prof. Anju Markose | Assistant Professor, Dept. of CSE | VJCET</a:t>
+            </a:r>
+          </a:p>
+        </p:txBody>
+      </p:sp>
+      <p:sp>
+        <p:nvSpPr>
+          <p:cNvPr id="11" name="TextBox 10"/>
+          <p:cNvSpPr txBox="1"/>
+          <p:nvPr/>
+        </p:nvSpPr>
+        <p:spPr>
+          <a:xfrm>
+            <a:off x="6858000" y="6327648"/>
+            <a:ext cx="4572000" cy="320040"/>
+          </a:xfrm>
+          <a:prstGeom prst="rect">
+            <a:avLst/>
+          </a:prstGeom>
+          <a:noFill/>
+        </p:spPr>
+        <p:txBody>
+          <a:bodyPr wrap="none">
+            <a:spAutoFit/>
+          </a:bodyPr>
+          <a:lstStyle/>
+          <a:p>
+            <a:pPr algn="r">
+              <a:defRPr sz="950">
+                <a:solidFill>
+                  <a:srgbClr val="64748B"/>
+                </a:solidFill>
+              </a:defRPr>
+            </a:pPr>
+            <a:r>
+              <a:t>Dept. of CSE, VJCET</a:t>
+            </a:r>
+          </a:p>
+        </p:txBody>
+      </p:sp>
+    </p:spTree>
+  </p:cSld>
+  <p:clrMapOvr>
+    <a:masterClrMapping/>
+  </p:clrMapOvr>
+</p:sld>
+</file>
+
+<file path=ppt/slides/slide5.xml><?xml version="1.0" encoding="utf-8"?>
+<p:sld xmlns:a="http://schemas.openxmlformats.org/drawingml/2006/main" xmlns:p="http://schemas.openxmlformats.org/presentationml/2006/main" xmlns:r="http://schemas.openxmlformats.org/officeDocument/2006/relationships">
+  <p:cSld>
+    <p:spTree>
+      <p:nvGrpSpPr>
+        <p:cNvPr id="1" name=""/>
+        <p:cNvGrpSpPr/>
+        <p:nvPr/>
+      </p:nvGrpSpPr>
+      <p:grpSpPr/>
+      <p:sp>
+        <p:nvSpPr>
+          <p:cNvPr id="2" name="Rectangle 1"/>
+          <p:cNvSpPr/>
+          <p:nvPr/>
+        </p:nvSpPr>
+        <p:spPr>
+          <a:xfrm>
+            <a:off x="0" y="0"/>
+            <a:ext cx="12191695" cy="1005840"/>
+          </a:xfrm>
+          <a:prstGeom prst="rect">
+            <a:avLst/>
+          </a:prstGeom>
+          <a:solidFill>
+            <a:srgbClr val="0F1E4A"/>
+          </a:solidFill>
+          <a:ln>
+            <a:noFill/>
+          </a:ln>
+        </p:spPr>
+        <p:style>
+          <a:lnRef idx="1">
+            <a:schemeClr val="accent1"/>
+          </a:lnRef>
+          <a:fillRef idx="3">
+            <a:schemeClr val="accent1"/>
+          </a:fillRef>
+          <a:effectRef idx="2">
+            <a:schemeClr val="accent1"/>
+          </a:effectRef>
+          <a:fontRef idx="minor">
+            <a:schemeClr val="lt1"/>
+          </a:fontRef>
+        </p:style>
+        <p:txBody>
+          <a:bodyPr rtlCol="0" anchor="ctr"/>
+          <a:lstStyle/>
+          <a:p>
+            <a:pPr algn="ctr"/>
+          </a:p>
+        </p:txBody>
+      </p:sp>
+      <p:sp>
+        <p:nvSpPr>
+          <p:cNvPr id="3" name="Rectangle 2"/>
+          <p:cNvSpPr/>
+          <p:nvPr/>
+        </p:nvSpPr>
+        <p:spPr>
+          <a:xfrm>
+            <a:off x="0" y="969264"/>
+            <a:ext cx="12191695" cy="36576"/>
+          </a:xfrm>
+          <a:prstGeom prst="rect">
+            <a:avLst/>
+          </a:prstGeom>
+          <a:solidFill>
+            <a:srgbClr val="D97706"/>
+          </a:solidFill>
+          <a:ln>
+            <a:noFill/>
+          </a:ln>
+        </p:spPr>
+        <p:style>
+          <a:lnRef idx="1">
+            <a:schemeClr val="accent1"/>
+          </a:lnRef>
+          <a:fillRef idx="3">
+            <a:schemeClr val="accent1"/>
+          </a:fillRef>
+          <a:effectRef idx="2">
+            <a:schemeClr val="accent1"/>
+          </a:effectRef>
+          <a:fontRef idx="minor">
+            <a:schemeClr val="lt1"/>
+          </a:fontRef>
+        </p:style>
+        <p:txBody>
+          <a:bodyPr rtlCol="0" anchor="ctr"/>
+          <a:lstStyle/>
+          <a:p>
+            <a:pPr algn="ctr"/>
+          </a:p>
+        </p:txBody>
+      </p:sp>
+      <p:sp>
+        <p:nvSpPr>
+          <p:cNvPr id="4" name="TextBox 3"/>
+          <p:cNvSpPr txBox="1"/>
+          <p:nvPr/>
+        </p:nvSpPr>
+        <p:spPr>
+          <a:xfrm>
+            <a:off x="731520" y="164592"/>
+            <a:ext cx="8412480" cy="685800"/>
+          </a:xfrm>
+          <a:prstGeom prst="rect">
+            <a:avLst/>
+          </a:prstGeom>
+          <a:noFill/>
+        </p:spPr>
+        <p:txBody>
+          <a:bodyPr wrap="none">
+            <a:spAutoFit/>
+          </a:bodyPr>
+          <a:lstStyle/>
+          <a:p>
+            <a:pPr>
+              <a:defRPr b="1" sz="2100">
+                <a:solidFill>
+                  <a:srgbClr val="F8FAFC"/>
+                </a:solidFill>
+              </a:defRPr>
+            </a:pPr>
+            <a:r>
+              <a:t>🎯 Exam Booster &amp; Review: IPv4, CIDR &amp; NAT</a:t>
+            </a:r>
+          </a:p>
+        </p:txBody>
+      </p:sp>
+      <p:sp>
+        <p:nvSpPr>
+          <p:cNvPr id="5" name="TextBox 4"/>
+          <p:cNvSpPr txBox="1"/>
+          <p:nvPr/>
+        </p:nvSpPr>
+        <p:spPr>
+          <a:xfrm>
+            <a:off x="8229600" y="164592"/>
+            <a:ext cx="3291840" cy="685800"/>
+          </a:xfrm>
+          <a:prstGeom prst="rect">
+            <a:avLst/>
+          </a:prstGeom>
+          <a:noFill/>
+        </p:spPr>
+        <p:txBody>
+          <a:bodyPr wrap="none">
+            <a:spAutoFit/>
+          </a:bodyPr>
+          <a:lstStyle/>
+          <a:p>
+            <a:pPr algn="r">
+              <a:defRPr b="1" sz="1300">
+                <a:solidFill>
+                  <a:srgbClr val="D97706"/>
+                </a:solidFill>
+              </a:defRPr>
+            </a:pPr>
+            <a:r>
+              <a:t>M2.2.2</a:t>
+            </a:r>
+          </a:p>
+        </p:txBody>
+      </p:sp>
+      <p:sp>
+        <p:nvSpPr>
+          <p:cNvPr id="6" name="Rounded Rectangle 5"/>
+          <p:cNvSpPr/>
+          <p:nvPr/>
+        </p:nvSpPr>
+        <p:spPr>
+          <a:xfrm>
+            <a:off x="731520" y="1234440"/>
+            <a:ext cx="5303520" cy="4892040"/>
+          </a:xfrm>
+          <a:prstGeom prst="roundRect">
+            <a:avLst/>
+          </a:prstGeom>
+          <a:solidFill>
+            <a:srgbClr val="FEF3C7"/>
+          </a:solidFill>
+          <a:ln w="19050">
+            <a:solidFill>
+              <a:srgbClr val="D97706"/>
+            </a:solidFill>
+          </a:ln>
+        </p:spPr>
+        <p:style>
+          <a:lnRef idx="1">
+            <a:schemeClr val="accent1"/>
+          </a:lnRef>
+          <a:fillRef idx="3">
+            <a:schemeClr val="accent1"/>
+          </a:fillRef>
+          <a:effectRef idx="2">
+            <a:schemeClr val="accent1"/>
+          </a:effectRef>
+          <a:fontRef idx="minor">
+            <a:schemeClr val="lt1"/>
+          </a:fontRef>
+        </p:style>
+        <p:txBody>
+          <a:bodyPr rtlCol="0" anchor="ctr"/>
+          <a:lstStyle/>
+          <a:p>
+            <a:pPr algn="ctr"/>
+          </a:p>
+        </p:txBody>
+      </p:sp>
+      <p:sp>
+        <p:nvSpPr>
+          <p:cNvPr id="7" name="TextBox 6"/>
+          <p:cNvSpPr txBox="1"/>
+          <p:nvPr/>
+        </p:nvSpPr>
+        <p:spPr>
+          <a:xfrm>
+            <a:off x="914400" y="1371600"/>
+            <a:ext cx="4937760" cy="4572000"/>
+          </a:xfrm>
+          <a:prstGeom prst="rect">
+            <a:avLst/>
+          </a:prstGeom>
+          <a:noFill/>
+        </p:spPr>
+        <p:txBody>
+          <a:bodyPr wrap="square">
+            <a:spAutoFit/>
+          </a:bodyPr>
+          <a:lstStyle/>
+          <a:p>
+            <a:pPr>
+              <a:spcAft>
+                <a:spcPts val="1000"/>
+              </a:spcAft>
+              <a:defRPr b="1" sz="1450">
+                <a:solidFill>
+                  <a:srgbClr val="D97706"/>
+                </a:solidFill>
+              </a:defRPr>
+            </a:pPr>
+            <a:r>
+              <a:t>📚 KTU High-Yield Questions (K3 Apply)</a:t>
+            </a:r>
+          </a:p>
+          <a:p>
+            <a:pPr>
+              <a:spcAft>
+                <a:spcPts val="700"/>
+              </a:spcAft>
+              <a:defRPr sz="1200">
+                <a:solidFill>
+                  <a:srgbClr val="0F172A"/>
+                </a:solidFill>
+              </a:defRPr>
+            </a:pPr>
+            <a:r>
+              <a:t>Q: Draw the complete IPv4 header format and explain all fields with numerical significance. (8 Marks)</a:t>
+            </a:r>
+          </a:p>
+          <a:p>
+            <a:pPr>
+              <a:spcAft>
+                <a:spcPts val="700"/>
+              </a:spcAft>
+              <a:defRPr sz="1200">
+                <a:solidFill>
+                  <a:srgbClr val="0F172A"/>
+                </a:solidFill>
+              </a:defRPr>
+            </a:pPr>
+            <a:r>
+              <a:t>Q: Explain the working of Network Address Translation (NAT) and Port Address Translation (PAT) with translation table examples. (7 Marks)</a:t>
+            </a:r>
+          </a:p>
+          <a:p>
+            <a:pPr>
+              <a:spcAft>
+                <a:spcPts val="700"/>
+              </a:spcAft>
+              <a:defRPr sz="1200">
+                <a:solidFill>
+                  <a:srgbClr val="0F172A"/>
+                </a:solidFill>
+              </a:defRPr>
+            </a:pPr>
+            <a:r>
+              <a:t>Q: What is ICMP? Explain its role in error reporting (Destination Unreachable, Time Exceeded) and diagnostic tools (`ping`, `traceroute`). (6 Marks)</a:t>
+            </a:r>
+          </a:p>
+        </p:txBody>
+      </p:sp>
+      <p:sp>
+        <p:nvSpPr>
+          <p:cNvPr id="8" name="Rounded Rectangle 7"/>
+          <p:cNvSpPr/>
+          <p:nvPr/>
+        </p:nvSpPr>
+        <p:spPr>
+          <a:xfrm>
+            <a:off x="6309360" y="1234440"/>
+            <a:ext cx="5212080" cy="4892040"/>
+          </a:xfrm>
+          <a:prstGeom prst="roundRect">
+            <a:avLst/>
+          </a:prstGeom>
+          <a:solidFill>
+            <a:srgbClr val="EEF2FF"/>
+          </a:solidFill>
+          <a:ln w="19050">
+            <a:solidFill>
+              <a:srgbClr val="0E7490"/>
+            </a:solidFill>
+          </a:ln>
+        </p:spPr>
+        <p:style>
+          <a:lnRef idx="1">
+            <a:schemeClr val="accent1"/>
+          </a:lnRef>
+          <a:fillRef idx="3">
+            <a:schemeClr val="accent1"/>
+          </a:fillRef>
+          <a:effectRef idx="2">
+            <a:schemeClr val="accent1"/>
+          </a:effectRef>
+          <a:fontRef idx="minor">
+            <a:schemeClr val="lt1"/>
+          </a:fontRef>
+        </p:style>
+        <p:txBody>
+          <a:bodyPr rtlCol="0" anchor="ctr"/>
+          <a:lstStyle/>
+          <a:p>
+            <a:pPr algn="ctr"/>
+          </a:p>
+        </p:txBody>
+      </p:sp>
+      <p:sp>
+        <p:nvSpPr>
+          <p:cNvPr id="9" name="TextBox 8"/>
+          <p:cNvSpPr txBox="1"/>
+          <p:nvPr/>
+        </p:nvSpPr>
+        <p:spPr>
+          <a:xfrm>
+            <a:off x="6492240" y="1371600"/>
+            <a:ext cx="4846320" cy="4572000"/>
+          </a:xfrm>
+          <a:prstGeom prst="rect">
+            <a:avLst/>
+          </a:prstGeom>
+          <a:noFill/>
+        </p:spPr>
+        <p:txBody>
+          <a:bodyPr wrap="square">
+            <a:spAutoFit/>
+          </a:bodyPr>
+          <a:lstStyle/>
+          <a:p>
+            <a:pPr>
+              <a:spcAft>
+                <a:spcPts val="1000"/>
+              </a:spcAft>
+              <a:defRPr b="1" sz="1450">
+                <a:solidFill>
+                  <a:srgbClr val="0E7490"/>
+                </a:solidFill>
+              </a:defRPr>
+            </a:pPr>
+            <a:r>
+              <a:t>💡 Critical Conceptual Takeaways</a:t>
+            </a:r>
+          </a:p>
+          <a:p>
+            <a:pPr>
+              <a:spcAft>
+                <a:spcPts val="600"/>
+              </a:spcAft>
+              <a:defRPr sz="1200">
+                <a:solidFill>
+                  <a:srgbClr val="0F172A"/>
+                </a:solidFill>
+              </a:defRPr>
+            </a:pPr>
+            <a:r>
+              <a:t>✔ IPv4 fragmentation uses ID, Flags (DF, MF), and Offset in 8-byte blocks.</a:t>
+            </a:r>
+          </a:p>
+          <a:p>
+            <a:pPr>
+              <a:spcAft>
+                <a:spcPts val="600"/>
+              </a:spcAft>
+              <a:defRPr sz="1200">
+                <a:solidFill>
+                  <a:srgbClr val="0F172A"/>
+                </a:solidFill>
+              </a:defRPr>
+            </a:pPr>
+            <a:r>
+              <a:t>✔ CIDR replaces classful boundaries with arbitrary prefix lengths (/N) and Longest Prefix Matching.</a:t>
+            </a:r>
+          </a:p>
+          <a:p>
+            <a:pPr>
+              <a:spcAft>
+                <a:spcPts val="600"/>
+              </a:spcAft>
+              <a:defRPr sz="1200">
+                <a:solidFill>
+                  <a:srgbClr val="0F172A"/>
+                </a:solidFill>
+              </a:defRPr>
+            </a:pPr>
+            <a:r>
+              <a:t>✔ NAT allows private IP subnets (RFC 1918) to share a single public IP using port mapping tables.</a:t>
+            </a:r>
+          </a:p>
+        </p:txBody>
+      </p:sp>
+      <p:sp>
+        <p:nvSpPr>
+          <p:cNvPr id="10" name="TextBox 9"/>
+          <p:cNvSpPr txBox="1"/>
+          <p:nvPr/>
+        </p:nvSpPr>
+        <p:spPr>
+          <a:xfrm>
+            <a:off x="731520" y="6327648"/>
+            <a:ext cx="10789920" cy="320040"/>
+          </a:xfrm>
+          <a:prstGeom prst="rect">
+            <a:avLst/>
+          </a:prstGeom>
+          <a:noFill/>
+        </p:spPr>
+        <p:txBody>
+          <a:bodyPr wrap="none">
+            <a:spAutoFit/>
+          </a:bodyPr>
+          <a:lstStyle/>
+          <a:p>
+            <a:pPr>
+              <a:defRPr sz="950">
+                <a:solidFill>
+                  <a:srgbClr val="64748B"/>
+                </a:solidFill>
+              </a:defRPr>
+            </a:pPr>
+            <a:r>
+              <a:t>PCCST501 Computer Networks | KTU 2024 Scheme | Prof. Anju Markose | Assistant Professor, Dept. of CSE | VJCET</a:t>
+            </a:r>
+          </a:p>
+        </p:txBody>
+      </p:sp>
+      <p:sp>
+        <p:nvSpPr>
+          <p:cNvPr id="11" name="TextBox 10"/>
+          <p:cNvSpPr txBox="1"/>
+          <p:nvPr/>
+        </p:nvSpPr>
+        <p:spPr>
+          <a:xfrm>
+            <a:off x="6858000" y="6327648"/>
+            <a:ext cx="4572000" cy="320040"/>
+          </a:xfrm>
+          <a:prstGeom prst="rect">
+            <a:avLst/>
+          </a:prstGeom>
+          <a:noFill/>
+        </p:spPr>
+        <p:txBody>
+          <a:bodyPr wrap="none">
+            <a:spAutoFit/>
+          </a:bodyPr>
+          <a:lstStyle/>
+          <a:p>
+            <a:pPr algn="r">
+              <a:defRPr sz="950">
+                <a:solidFill>
+                  <a:srgbClr val="64748B"/>
+                </a:solidFill>
+              </a:defRPr>
+            </a:pPr>
+            <a:r>
+              <a:t>Dept. of CSE, VJCET</a:t>
             </a:r>
           </a:p>
         </p:txBody>
